--- a/slides/13_Our_Own_Insights.pptx
+++ b/slides/13_Our_Own_Insights.pptx
@@ -128,28 +128,28 @@
   <p:extLst>
     <p:ext uri="{521415D9-36F7-43E2-AB2F-B90AF26B5E84}">
       <p14:sectionLst xmlns:p14="http://schemas.microsoft.com/office/powerpoint/2010/main">
-        <p14:section name="Introduction" id="{06ddddc6-a20d-e9ba-29de-25a8b9b4679e}">
+        <p14:section name="Introduction" id="{e5d206a5-2ada-7996-e0a0-10a3bac75cf5}">
           <p14:sldIdLst>
             <p14:sldId id="256"/>
             <p14:sldId id="257"/>
             <p14:sldId id="258"/>
           </p14:sldIdLst>
         </p14:section>
-        <p14:section name="Our example story so far" id="{40011526-505f-4b3e-7334-9845d8509603}">
+        <p14:section name="Our example story so far" id="{bc40e0c9-d016-d3c5-c78f-d68d3e25d55f}">
           <p14:sldIdLst>
             <p14:sldId id="259"/>
             <p14:sldId id="260"/>
             <p14:sldId id="261"/>
           </p14:sldIdLst>
         </p14:section>
-        <p14:section name="Planning our insights" id="{50666c2c-89be-f3e1-e4f5-dfbfbf46d7ff}">
+        <p14:section name="Planning our insights" id="{33ff23b8-1df1-8014-5ea8-64ad57682325}">
           <p14:sldIdLst>
             <p14:sldId id="262"/>
             <p14:sldId id="263"/>
             <p14:sldId id="264"/>
           </p14:sldIdLst>
         </p14:section>
-        <p14:section name="Patterns we can reuse" id="{12e8f4c2-d001-b732-5c24-86b3e3869ad6}">
+        <p14:section name="Patterns we can reuse" id="{f96ff7cb-71b4-157a-851d-ded60a67994d}">
           <p14:sldIdLst>
             <p14:sldId id="265"/>
             <p14:sldId id="266"/>
@@ -157,26 +157,26 @@
             <p14:sldId id="268"/>
           </p14:sldIdLst>
         </p14:section>
-        <p14:section name="Building our insights" id="{231acc0c-044e-e3b8-a927-5fcd2fe01d4e}">
+        <p14:section name="Building our insights" id="{6fe2d316-b95d-c812-2888-e50b2c96bf82}">
           <p14:sldIdLst>
             <p14:sldId id="269"/>
             <p14:sldId id="270"/>
             <p14:sldId id="271"/>
           </p14:sldIdLst>
         </p14:section>
-        <p14:section name="Checking each insight" id="{1d4401d6-63cb-2580-02ef-33b72473d713}">
+        <p14:section name="Checking each insight" id="{cb5a77f0-704c-39d7-a942-053ca900c1e4}">
           <p14:sldIdLst>
             <p14:sldId id="272"/>
             <p14:sldId id="273"/>
           </p14:sldIdLst>
         </p14:section>
-        <p14:section name="Checking with a partner" id="{04ee7924-36d1-02d8-6fe8-d6396c9db31e}">
+        <p14:section name="Checking with a partner" id="{43cad326-a798-ab08-115c-0ca1bf45c275}">
           <p14:sldIdLst>
             <p14:sldId id="274"/>
             <p14:sldId id="275"/>
           </p14:sldIdLst>
         </p14:section>
-        <p14:section name="Wrap up" id="{e1ffddf2-655e-6f22-4019-275ff36a72d7}">
+        <p14:section name="Wrap up" id="{32b9126a-024d-cb30-a30e-1754b6c6e754}">
           <p14:sldIdLst>
             <p14:sldId id="276"/>
             <p14:sldId id="277"/>
@@ -3905,7 +3905,7 @@
                         <a:t>​</a:t>
                       </a:r>
                       <a:r>
-                        <a:rPr lang="en-US" sz="1200" dirty="0">
+                        <a:rPr lang="en-US" sz="1200" b="1" dirty="0">
                           <a:solidFill>
                             <a:srgbClr val="B86E1E"/>
                           </a:solidFill>
@@ -4186,7 +4186,7 @@
                         <a:t>​</a:t>
                       </a:r>
                       <a:r>
-                        <a:rPr lang="en-US" sz="1200" dirty="0">
+                        <a:rPr lang="en-US" sz="1200" b="1" dirty="0">
                           <a:solidFill>
                             <a:srgbClr val="B86E1E"/>
                           </a:solidFill>
@@ -4467,7 +4467,7 @@
                         <a:t>​</a:t>
                       </a:r>
                       <a:r>
-                        <a:rPr lang="en-US" sz="1200" dirty="0">
+                        <a:rPr lang="en-US" sz="1200" b="1" dirty="0">
                           <a:solidFill>
                             <a:srgbClr val="B86E1E"/>
                           </a:solidFill>
@@ -4748,7 +4748,7 @@
                         <a:t>​</a:t>
                       </a:r>
                       <a:r>
-                        <a:rPr lang="en-US" sz="1200" dirty="0">
+                        <a:rPr lang="en-US" sz="1200" b="1" dirty="0">
                           <a:solidFill>
                             <a:srgbClr val="B86E1E"/>
                           </a:solidFill>
@@ -5415,7 +5415,7 @@
                         <a:t>​</a:t>
                       </a:r>
                       <a:r>
-                        <a:rPr lang="en-US" sz="1200" dirty="0">
+                        <a:rPr lang="en-US" sz="1200" b="1" dirty="0">
                           <a:solidFill>
                             <a:srgbClr val="B86E1E"/>
                           </a:solidFill>
@@ -5434,7 +5434,7 @@
                         <a:t>, with </a:t>
                       </a:r>
                       <a:r>
-                        <a:rPr lang="en-US" sz="1200" dirty="0">
+                        <a:rPr lang="en-US" sz="1200" b="1" dirty="0">
                           <a:solidFill>
                             <a:srgbClr val="B86E1E"/>
                           </a:solidFill>
@@ -5723,7 +5723,7 @@
                         <a:t>​</a:t>
                       </a:r>
                       <a:r>
-                        <a:rPr lang="en-US" sz="1200" dirty="0">
+                        <a:rPr lang="en-US" sz="1200" b="1" dirty="0">
                           <a:solidFill>
                             <a:srgbClr val="B86E1E"/>
                           </a:solidFill>
@@ -6004,7 +6004,7 @@
                         <a:t>​</a:t>
                       </a:r>
                       <a:r>
-                        <a:rPr lang="en-US" sz="1200" dirty="0">
+                        <a:rPr lang="en-US" sz="1200" b="1" dirty="0">
                           <a:solidFill>
                             <a:srgbClr val="B86E1E"/>
                           </a:solidFill>
@@ -6023,7 +6023,7 @@
                         <a:t> then </a:t>
                       </a:r>
                       <a:r>
-                        <a:rPr lang="en-US" sz="1200" dirty="0">
+                        <a:rPr lang="en-US" sz="1200" b="1" dirty="0">
                           <a:solidFill>
                             <a:srgbClr val="B86E1E"/>
                           </a:solidFill>
@@ -6304,7 +6304,7 @@
                         <a:t>​</a:t>
                       </a:r>
                       <a:r>
-                        <a:rPr lang="en-US" sz="1200" dirty="0">
+                        <a:rPr lang="en-US" sz="1200" b="1" dirty="0">
                           <a:solidFill>
                             <a:srgbClr val="B86E1E"/>
                           </a:solidFill>
@@ -6928,7 +6928,7 @@
               <a:t>When we copy a pattern, give every new variable a new name, like </a:t>
             </a:r>
             <a:r>
-              <a:rPr lang="en-US" sz="1800" dirty="0">
+              <a:rPr lang="en-US" sz="1800" b="1" dirty="0">
                 <a:solidFill>
                   <a:srgbClr val="B86E1E"/>
                 </a:solidFill>
@@ -6947,7 +6947,7 @@
               <a:t> instead of </a:t>
             </a:r>
             <a:r>
-              <a:rPr lang="en-US" sz="1800" dirty="0">
+              <a:rPr lang="en-US" sz="1800" b="1" dirty="0">
                 <a:solidFill>
                   <a:srgbClr val="B86E1E"/>
                 </a:solidFill>
@@ -6966,7 +6966,7 @@
               <a:t>. If two cells create the same variable, marimo stops both with a </a:t>
             </a:r>
             <a:r>
-              <a:rPr lang="en-US" sz="1800" dirty="0">
+              <a:rPr lang="en-US" sz="1800" b="1" dirty="0">
                 <a:solidFill>
                   <a:srgbClr val="B86E1E"/>
                 </a:solidFill>
@@ -12788,7 +12788,7 @@
               <a:t> from </a:t>
             </a:r>
             <a:r>
-              <a:rPr lang="en-US" sz="1600" dirty="0">
+              <a:rPr lang="en-US" sz="1600" b="1" dirty="0">
                 <a:solidFill>
                   <a:srgbClr val="E8A55A"/>
                 </a:solidFill>
@@ -13194,7 +13194,7 @@
               <a:t>Add a new heading </a:t>
             </a:r>
             <a:r>
-              <a:rPr lang="en-US" sz="1300" dirty="0">
+              <a:rPr lang="en-US" sz="1300" b="1" dirty="0">
                 <a:solidFill>
                   <a:srgbClr val="B86E1E"/>
                 </a:solidFill>
